--- a/courseware/202612_ADS_W16_Review_Final_Machine_Exam.pptx
+++ b/courseware/202612_ADS_W16_Review_Final_Machine_Exam.pptx
@@ -19441,6 +19441,49 @@
                 <a:latin typeface="Segoe UI"/>
                 <a:ea typeface="微软雅黑"/>
               </a:rPr>
+              <a:t>•  ☐ </a:t>
+            </a:r>
+            <a:r>
+              <a:rPr sz="1879" b="0" i="0">
+                <a:solidFill>
+                  <a:srgbClr val="242A33"/>
+                </a:solidFill>
+                <a:latin typeface="Consolas"/>
+                <a:ea typeface="Consolas"/>
+              </a:rPr>
+              <a:t>tools/redteam_exam.py</a:t>
+            </a:r>
+            <a:r>
+              <a:rPr sz="2000" b="0" i="0">
+                <a:solidFill>
+                  <a:srgbClr val="242A33"/>
+                </a:solidFill>
+                <a:latin typeface="Segoe UI"/>
+                <a:ea typeface="微软雅黑"/>
+              </a:rPr>
+              <a:t> 已跑过 T1–T6 的 WA / TLE / MLE 反例</a:t>
+            </a:r>
+          </a:p>
+          <a:p>
+            <a:pPr algn="l">
+              <a:lnSpc>
+                <a:spcPct val="132000"/>
+              </a:lnSpc>
+              <a:spcBef>
+                <a:spcPts val="0"/>
+              </a:spcBef>
+              <a:spcAft>
+                <a:spcPts val="1240"/>
+              </a:spcAft>
+            </a:pPr>
+            <a:r>
+              <a:rPr sz="2000" b="0" i="0">
+                <a:solidFill>
+                  <a:srgbClr val="242A33"/>
+                </a:solidFill>
+                <a:latin typeface="Segoe UI"/>
+                <a:ea typeface="微软雅黑"/>
+              </a:rPr>
               <a:t>•  ☐ 时限按参考解答实测时间的 </a:t>
             </a:r>
             <a:r>

--- a/courseware/202612_ADS_W16_Review_Final_Machine_Exam.pptx
+++ b/courseware/202612_ADS_W16_Review_Final_Machine_Exam.pptx
@@ -18335,7 +18335,7 @@
                 <a:latin typeface="Consolas"/>
                 <a:ea typeface="Consolas"/>
               </a:rPr>
-              <a:t>   45-80 min    T4、T5</a:t>
+              <a:t>   45-78 min    T4、T5</a:t>
             </a:r>
           </a:p>
           <a:p>
@@ -18358,7 +18358,7 @@
                 <a:latin typeface="Consolas"/>
                 <a:ea typeface="Consolas"/>
               </a:rPr>
-              <a:t>   80-110 min   T6 或回头补前面卡住的题</a:t>
+              <a:t>   78-102 min   T6 或回头补前面卡住的题</a:t>
             </a:r>
           </a:p>
           <a:p>
@@ -18381,7 +18381,7 @@
                 <a:latin typeface="Consolas"/>
                 <a:ea typeface="Consolas"/>
               </a:rPr>
-              <a:t>   110-120 min  检查输出格式：多余空格、换行、精度、特殊边界</a:t>
+              <a:t>   102-112 min  检查输出格式：多余空格、换行、精度、特殊边界</a:t>
             </a:r>
           </a:p>
         </p:txBody>
@@ -20706,7 +20706,7 @@
                 <a:latin typeface="Segoe UI"/>
                 <a:ea typeface="微软雅黑"/>
               </a:rPr>
-              <a:t>6 题 / 约 120 分钟</a:t>
+              <a:t>6 题 / 112 分钟</a:t>
             </a:r>
             <a:r>
               <a:rPr sz="2000" b="0" i="0">
@@ -23880,7 +23880,7 @@
                           <a:latin typeface="Segoe UI"/>
                           <a:ea typeface="微软雅黑"/>
                         </a:rPr>
-                        <a:t>第 16 周（日期节次以通知为准）；约 120 分钟</a:t>
+                        <a:t>第 16 周（日期节次以通知为准）；112 分钟</a:t>
                       </a:r>
                     </a:p>
                   </a:txBody>

--- a/courseware/202612_ADS_W16_Review_Final_Machine_Exam.pptx
+++ b/courseware/202612_ADS_W16_Review_Final_Machine_Exam.pptx
@@ -10963,14 +10963,14 @@
               <a:t>：状态是 </a:t>
             </a:r>
             <a:r>
-              <a:rPr sz="2000" b="1" i="0">
+              <a:rPr sz="1879" b="1" i="0">
                 <a:solidFill>
                   <a:srgbClr val="12395B"/>
                 </a:solidFill>
-                <a:latin typeface="Segoe UI"/>
-                <a:ea typeface="微软雅黑"/>
-              </a:rPr>
-              <a:t>`(x, y, 已穿墙次数)`</a:t>
+                <a:latin typeface="Consolas"/>
+                <a:ea typeface="Consolas"/>
+              </a:rPr>
+              <a:t>(x, y, 已穿墙次数)</a:t>
             </a:r>
             <a:r>
               <a:rPr sz="2000" b="0" i="0">

--- a/courseware/202612_ADS_W16_Review_Final_Machine_Exam.pptx
+++ b/courseware/202612_ADS_W16_Review_Final_Machine_Exam.pptx
@@ -5504,7 +5504,7 @@
                 <a:latin typeface="Consolas"/>
                 <a:ea typeface="Consolas"/>
               </a:rPr>
-              <a:t>   T1  15分  *          签到题，90% 学生应 AC        -- 保证及格线</a:t>
+              <a:t>   T1   *          签到题，90% 学生应 AC        -- 保证及格线</a:t>
             </a:r>
           </a:p>
           <a:p>
@@ -5527,7 +5527,7 @@
                 <a:latin typeface="Consolas"/>
                 <a:ea typeface="Consolas"/>
               </a:rPr>
-              <a:t>   T2  15分  **         基础数据结构应用，70% AC</a:t>
+              <a:t>   T2   **         基础数据结构应用，70% AC</a:t>
             </a:r>
           </a:p>
           <a:p>
@@ -5550,7 +5550,7 @@
                 <a:latin typeface="Consolas"/>
                 <a:ea typeface="Consolas"/>
               </a:rPr>
-              <a:t>   T3  15分  ***        需要一次转化（排序键），55% AC</a:t>
+              <a:t>   T3   ***        需要一次转化（排序键），55% AC</a:t>
             </a:r>
           </a:p>
           <a:p>
@@ -5573,7 +5573,7 @@
                 <a:latin typeface="Consolas"/>
                 <a:ea typeface="Consolas"/>
               </a:rPr>
-              <a:t>   T4  15分  ***        带状态搜索，45% AC</a:t>
+              <a:t>   T4   ***        带状态搜索，45% AC</a:t>
             </a:r>
           </a:p>
           <a:p>
@@ -5596,7 +5596,7 @@
                 <a:latin typeface="Consolas"/>
                 <a:ea typeface="Consolas"/>
               </a:rPr>
-              <a:t>   T5  20分  ****       DP，状态设计有难度，30% AC</a:t>
+              <a:t>   T5   ****       DP，状态设计有难度，30% AC</a:t>
             </a:r>
           </a:p>
           <a:p>
@@ -5619,7 +5619,7 @@
                 <a:latin typeface="Consolas"/>
                 <a:ea typeface="Consolas"/>
               </a:rPr>
-              <a:t>   T6  20分  *****      综合建模，15% AC             -- 区分优秀</a:t>
+              <a:t>   T6   *****      综合建模，15% AC             -- 区分优秀</a:t>
             </a:r>
           </a:p>
         </p:txBody>

--- a/courseware/202612_ADS_W16_Review_Final_Machine_Exam.pptx
+++ b/courseware/202612_ADS_W16_Review_Final_Machine_Exam.pptx
@@ -5440,190 +5440,1000 @@
           </a:p>
         </p:txBody>
       </p:sp>
-      <p:sp>
-        <p:nvSpPr>
-          <p:cNvPr id="4" name="TextBox 3"/>
-          <p:cNvSpPr txBox="1"/>
+      <p:graphicFrame>
+        <p:nvGraphicFramePr>
+          <p:cNvPr id="4" name="Table 3"/>
+          <p:cNvGraphicFramePr>
+            <a:graphicFrameLocks noGrp="1"/>
+          </p:cNvGraphicFramePr>
           <p:nvPr/>
-        </p:nvSpPr>
-        <p:spPr>
-          <a:xfrm>
-            <a:off x="566928" y="2538095"/>
-            <a:ext cx="11057839" cy="1964690"/>
-          </a:xfrm>
-          <a:prstGeom prst="rect">
-            <a:avLst/>
-          </a:prstGeom>
-          <a:noFill/>
-        </p:spPr>
-        <p:txBody>
-          <a:bodyPr wrap="square" lIns="0" rIns="0" tIns="0" bIns="0">
-            <a:noAutofit/>
-          </a:bodyPr>
-          <a:lstStyle/>
-          <a:p>
-            <a:pPr algn="l">
-              <a:lnSpc>
-                <a:spcPts val="2210"/>
-              </a:lnSpc>
-              <a:spcBef>
-                <a:spcPts val="0"/>
-              </a:spcBef>
-              <a:spcAft>
-                <a:spcPts val="0"/>
-              </a:spcAft>
-            </a:pPr>
-            <a:r>
-              <a:rPr sz="1700" b="0" i="0">
-                <a:solidFill>
-                  <a:srgbClr val="12395B"/>
-                </a:solidFill>
-                <a:latin typeface="Consolas"/>
-                <a:ea typeface="Consolas"/>
-              </a:rPr>
-              <a:t> </a:t>
-            </a:r>
-          </a:p>
-          <a:p>
-            <a:pPr algn="l">
-              <a:lnSpc>
-                <a:spcPts val="2210"/>
-              </a:lnSpc>
-              <a:spcBef>
-                <a:spcPts val="0"/>
-              </a:spcBef>
-              <a:spcAft>
-                <a:spcPts val="0"/>
-              </a:spcAft>
-            </a:pPr>
-            <a:r>
-              <a:rPr sz="1700" b="0" i="0">
-                <a:solidFill>
-                  <a:srgbClr val="12395B"/>
-                </a:solidFill>
-                <a:latin typeface="Consolas"/>
-                <a:ea typeface="Consolas"/>
-              </a:rPr>
-              <a:t>   T1   *          签到题，90% 学生应 AC        -- 保证及格线</a:t>
-            </a:r>
-          </a:p>
-          <a:p>
-            <a:pPr algn="l">
-              <a:lnSpc>
-                <a:spcPts val="2210"/>
-              </a:lnSpc>
-              <a:spcBef>
-                <a:spcPts val="0"/>
-              </a:spcBef>
-              <a:spcAft>
-                <a:spcPts val="0"/>
-              </a:spcAft>
-            </a:pPr>
-            <a:r>
-              <a:rPr sz="1700" b="0" i="0">
-                <a:solidFill>
-                  <a:srgbClr val="12395B"/>
-                </a:solidFill>
-                <a:latin typeface="Consolas"/>
-                <a:ea typeface="Consolas"/>
-              </a:rPr>
-              <a:t>   T2   **         基础数据结构应用，70% AC</a:t>
-            </a:r>
-          </a:p>
-          <a:p>
-            <a:pPr algn="l">
-              <a:lnSpc>
-                <a:spcPts val="2210"/>
-              </a:lnSpc>
-              <a:spcBef>
-                <a:spcPts val="0"/>
-              </a:spcBef>
-              <a:spcAft>
-                <a:spcPts val="0"/>
-              </a:spcAft>
-            </a:pPr>
-            <a:r>
-              <a:rPr sz="1700" b="0" i="0">
-                <a:solidFill>
-                  <a:srgbClr val="12395B"/>
-                </a:solidFill>
-                <a:latin typeface="Consolas"/>
-                <a:ea typeface="Consolas"/>
-              </a:rPr>
-              <a:t>   T3   ***        需要一次转化（排序键），55% AC</a:t>
-            </a:r>
-          </a:p>
-          <a:p>
-            <a:pPr algn="l">
-              <a:lnSpc>
-                <a:spcPts val="2210"/>
-              </a:lnSpc>
-              <a:spcBef>
-                <a:spcPts val="0"/>
-              </a:spcBef>
-              <a:spcAft>
-                <a:spcPts val="0"/>
-              </a:spcAft>
-            </a:pPr>
-            <a:r>
-              <a:rPr sz="1700" b="0" i="0">
-                <a:solidFill>
-                  <a:srgbClr val="12395B"/>
-                </a:solidFill>
-                <a:latin typeface="Consolas"/>
-                <a:ea typeface="Consolas"/>
-              </a:rPr>
-              <a:t>   T4   ***        带状态搜索，45% AC</a:t>
-            </a:r>
-          </a:p>
-          <a:p>
-            <a:pPr algn="l">
-              <a:lnSpc>
-                <a:spcPts val="2210"/>
-              </a:lnSpc>
-              <a:spcBef>
-                <a:spcPts val="0"/>
-              </a:spcBef>
-              <a:spcAft>
-                <a:spcPts val="0"/>
-              </a:spcAft>
-            </a:pPr>
-            <a:r>
-              <a:rPr sz="1700" b="0" i="0">
-                <a:solidFill>
-                  <a:srgbClr val="12395B"/>
-                </a:solidFill>
-                <a:latin typeface="Consolas"/>
-                <a:ea typeface="Consolas"/>
-              </a:rPr>
-              <a:t>   T5   ****       DP，状态设计有难度，30% AC</a:t>
-            </a:r>
-          </a:p>
-          <a:p>
-            <a:pPr algn="l">
-              <a:lnSpc>
-                <a:spcPts val="2210"/>
-              </a:lnSpc>
-              <a:spcBef>
-                <a:spcPts val="0"/>
-              </a:spcBef>
-              <a:spcAft>
-                <a:spcPts val="0"/>
-              </a:spcAft>
-            </a:pPr>
-            <a:r>
-              <a:rPr sz="1700" b="0" i="0">
-                <a:solidFill>
-                  <a:srgbClr val="12395B"/>
-                </a:solidFill>
-                <a:latin typeface="Consolas"/>
-                <a:ea typeface="Consolas"/>
-              </a:rPr>
-              <a:t>   T6   *****      综合建模，15% AC             -- 区分优秀</a:t>
-            </a:r>
-          </a:p>
-        </p:txBody>
-      </p:sp>
+        </p:nvGraphicFramePr>
+        <p:xfrm>
+          <a:off x="566928" y="1298448"/>
+          <a:ext cx="11057837" cy="3075940"/>
+        </p:xfrm>
+        <a:graphic>
+          <a:graphicData uri="http://schemas.openxmlformats.org/drawingml/2006/table">
+            <a:tbl>
+              <a:tblPr firstRow="1" bandRow="1">
+                <a:tableStyleId>{5C22544A-7EE6-4342-B048-85BDC9FD1C3A}</a:tableStyleId>
+              </a:tblPr>
+              <a:tblGrid>
+                <a:gridCol w="1923102"/>
+                <a:gridCol w="1923102"/>
+                <a:gridCol w="1923102"/>
+                <a:gridCol w="5288531"/>
+              </a:tblGrid>
+              <a:tr h="439420">
+                <a:tc>
+                  <a:txBody>
+                    <a:bodyPr wrap="square"/>
+                    <a:lstStyle/>
+                    <a:p>
+                      <a:pPr algn="l">
+                        <a:lnSpc>
+                          <a:spcPct val="122000"/>
+                        </a:lnSpc>
+                        <a:spcBef>
+                          <a:spcPts val="0"/>
+                        </a:spcBef>
+                        <a:spcAft>
+                          <a:spcPts val="0"/>
+                        </a:spcAft>
+                      </a:pPr>
+                      <a:r>
+                        <a:rPr sz="1700" b="1" i="0">
+                          <a:solidFill>
+                            <a:srgbClr val="FFFFFF"/>
+                          </a:solidFill>
+                          <a:latin typeface="Segoe UI"/>
+                          <a:ea typeface="微软雅黑"/>
+                        </a:rPr>
+                        <a:t>题号</a:t>
+                      </a:r>
+                    </a:p>
+                  </a:txBody>
+                  <a:tcPr marL="100584" marR="100584" marT="27432" marB="27432" anchor="ctr">
+                    <a:solidFill>
+                      <a:srgbClr val="12395B"/>
+                    </a:solidFill>
+                  </a:tcPr>
+                </a:tc>
+                <a:tc>
+                  <a:txBody>
+                    <a:bodyPr wrap="square"/>
+                    <a:lstStyle/>
+                    <a:p>
+                      <a:pPr algn="l">
+                        <a:lnSpc>
+                          <a:spcPct val="122000"/>
+                        </a:lnSpc>
+                        <a:spcBef>
+                          <a:spcPts val="0"/>
+                        </a:spcBef>
+                        <a:spcAft>
+                          <a:spcPts val="0"/>
+                        </a:spcAft>
+                      </a:pPr>
+                      <a:r>
+                        <a:rPr sz="1700" b="1" i="0">
+                          <a:solidFill>
+                            <a:srgbClr val="FFFFFF"/>
+                          </a:solidFill>
+                          <a:latin typeface="Segoe UI"/>
+                          <a:ea typeface="微软雅黑"/>
+                        </a:rPr>
+                        <a:t>难度</a:t>
+                      </a:r>
+                    </a:p>
+                  </a:txBody>
+                  <a:tcPr marL="100584" marR="100584" marT="27432" marB="27432" anchor="ctr">
+                    <a:solidFill>
+                      <a:srgbClr val="12395B"/>
+                    </a:solidFill>
+                  </a:tcPr>
+                </a:tc>
+                <a:tc>
+                  <a:txBody>
+                    <a:bodyPr wrap="square"/>
+                    <a:lstStyle/>
+                    <a:p>
+                      <a:pPr algn="l">
+                        <a:lnSpc>
+                          <a:spcPct val="122000"/>
+                        </a:lnSpc>
+                        <a:spcBef>
+                          <a:spcPts val="0"/>
+                        </a:spcBef>
+                        <a:spcAft>
+                          <a:spcPts val="0"/>
+                        </a:spcAft>
+                      </a:pPr>
+                      <a:r>
+                        <a:rPr sz="1700" b="1" i="0">
+                          <a:solidFill>
+                            <a:srgbClr val="FFFFFF"/>
+                          </a:solidFill>
+                          <a:latin typeface="Segoe UI"/>
+                          <a:ea typeface="微软雅黑"/>
+                        </a:rPr>
+                        <a:t>预期 AC</a:t>
+                      </a:r>
+                    </a:p>
+                  </a:txBody>
+                  <a:tcPr marL="100584" marR="100584" marT="27432" marB="27432" anchor="ctr">
+                    <a:solidFill>
+                      <a:srgbClr val="12395B"/>
+                    </a:solidFill>
+                  </a:tcPr>
+                </a:tc>
+                <a:tc>
+                  <a:txBody>
+                    <a:bodyPr wrap="square"/>
+                    <a:lstStyle/>
+                    <a:p>
+                      <a:pPr algn="l">
+                        <a:lnSpc>
+                          <a:spcPct val="122000"/>
+                        </a:lnSpc>
+                        <a:spcBef>
+                          <a:spcPts val="0"/>
+                        </a:spcBef>
+                        <a:spcAft>
+                          <a:spcPts val="0"/>
+                        </a:spcAft>
+                      </a:pPr>
+                      <a:r>
+                        <a:rPr sz="1700" b="1" i="0">
+                          <a:solidFill>
+                            <a:srgbClr val="FFFFFF"/>
+                          </a:solidFill>
+                          <a:latin typeface="Segoe UI"/>
+                          <a:ea typeface="微软雅黑"/>
+                        </a:rPr>
+                        <a:t>定位</a:t>
+                      </a:r>
+                    </a:p>
+                  </a:txBody>
+                  <a:tcPr marL="100584" marR="100584" marT="27432" marB="27432" anchor="ctr">
+                    <a:solidFill>
+                      <a:srgbClr val="12395B"/>
+                    </a:solidFill>
+                  </a:tcPr>
+                </a:tc>
+              </a:tr>
+              <a:tr h="439420">
+                <a:tc>
+                  <a:txBody>
+                    <a:bodyPr wrap="square"/>
+                    <a:lstStyle/>
+                    <a:p>
+                      <a:pPr algn="l">
+                        <a:lnSpc>
+                          <a:spcPct val="122000"/>
+                        </a:lnSpc>
+                        <a:spcBef>
+                          <a:spcPts val="0"/>
+                        </a:spcBef>
+                        <a:spcAft>
+                          <a:spcPts val="0"/>
+                        </a:spcAft>
+                      </a:pPr>
+                      <a:r>
+                        <a:rPr sz="1700" b="0" i="0">
+                          <a:solidFill>
+                            <a:srgbClr val="242A33"/>
+                          </a:solidFill>
+                          <a:latin typeface="Segoe UI"/>
+                          <a:ea typeface="微软雅黑"/>
+                        </a:rPr>
+                        <a:t>T1</a:t>
+                      </a:r>
+                    </a:p>
+                  </a:txBody>
+                  <a:tcPr marL="100584" marR="100584" marT="27432" marB="27432" anchor="ctr">
+                    <a:solidFill>
+                      <a:srgbClr val="FFFFFF"/>
+                    </a:solidFill>
+                  </a:tcPr>
+                </a:tc>
+                <a:tc>
+                  <a:txBody>
+                    <a:bodyPr wrap="square"/>
+                    <a:lstStyle/>
+                    <a:p>
+                      <a:pPr algn="l">
+                        <a:lnSpc>
+                          <a:spcPct val="122000"/>
+                        </a:lnSpc>
+                        <a:spcBef>
+                          <a:spcPts val="0"/>
+                        </a:spcBef>
+                        <a:spcAft>
+                          <a:spcPts val="0"/>
+                        </a:spcAft>
+                      </a:pPr>
+                      <a:r>
+                        <a:rPr sz="1700" b="0" i="0">
+                          <a:solidFill>
+                            <a:srgbClr val="242A33"/>
+                          </a:solidFill>
+                          <a:latin typeface="Segoe UI"/>
+                          <a:ea typeface="微软雅黑"/>
+                        </a:rPr>
+                        <a:t>★☆☆☆☆</a:t>
+                      </a:r>
+                    </a:p>
+                  </a:txBody>
+                  <a:tcPr marL="100584" marR="100584" marT="27432" marB="27432" anchor="ctr">
+                    <a:solidFill>
+                      <a:srgbClr val="FFFFFF"/>
+                    </a:solidFill>
+                  </a:tcPr>
+                </a:tc>
+                <a:tc>
+                  <a:txBody>
+                    <a:bodyPr wrap="square"/>
+                    <a:lstStyle/>
+                    <a:p>
+                      <a:pPr algn="l">
+                        <a:lnSpc>
+                          <a:spcPct val="122000"/>
+                        </a:lnSpc>
+                        <a:spcBef>
+                          <a:spcPts val="0"/>
+                        </a:spcBef>
+                        <a:spcAft>
+                          <a:spcPts val="0"/>
+                        </a:spcAft>
+                      </a:pPr>
+                      <a:r>
+                        <a:rPr sz="1700" b="0" i="0">
+                          <a:solidFill>
+                            <a:srgbClr val="242A33"/>
+                          </a:solidFill>
+                          <a:latin typeface="Segoe UI"/>
+                          <a:ea typeface="微软雅黑"/>
+                        </a:rPr>
+                        <a:t>90%</a:t>
+                      </a:r>
+                    </a:p>
+                  </a:txBody>
+                  <a:tcPr marL="100584" marR="100584" marT="27432" marB="27432" anchor="ctr">
+                    <a:solidFill>
+                      <a:srgbClr val="FFFFFF"/>
+                    </a:solidFill>
+                  </a:tcPr>
+                </a:tc>
+                <a:tc>
+                  <a:txBody>
+                    <a:bodyPr wrap="square"/>
+                    <a:lstStyle/>
+                    <a:p>
+                      <a:pPr algn="l">
+                        <a:lnSpc>
+                          <a:spcPct val="122000"/>
+                        </a:lnSpc>
+                        <a:spcBef>
+                          <a:spcPts val="0"/>
+                        </a:spcBef>
+                        <a:spcAft>
+                          <a:spcPts val="0"/>
+                        </a:spcAft>
+                      </a:pPr>
+                      <a:r>
+                        <a:rPr sz="1700" b="0" i="0">
+                          <a:solidFill>
+                            <a:srgbClr val="242A33"/>
+                          </a:solidFill>
+                          <a:latin typeface="Segoe UI"/>
+                          <a:ea typeface="微软雅黑"/>
+                        </a:rPr>
+                        <a:t>签到题 —— 保证及格线</a:t>
+                      </a:r>
+                    </a:p>
+                  </a:txBody>
+                  <a:tcPr marL="100584" marR="100584" marT="27432" marB="27432" anchor="ctr">
+                    <a:solidFill>
+                      <a:srgbClr val="FFFFFF"/>
+                    </a:solidFill>
+                  </a:tcPr>
+                </a:tc>
+              </a:tr>
+              <a:tr h="439420">
+                <a:tc>
+                  <a:txBody>
+                    <a:bodyPr wrap="square"/>
+                    <a:lstStyle/>
+                    <a:p>
+                      <a:pPr algn="l">
+                        <a:lnSpc>
+                          <a:spcPct val="122000"/>
+                        </a:lnSpc>
+                        <a:spcBef>
+                          <a:spcPts val="0"/>
+                        </a:spcBef>
+                        <a:spcAft>
+                          <a:spcPts val="0"/>
+                        </a:spcAft>
+                      </a:pPr>
+                      <a:r>
+                        <a:rPr sz="1700" b="0" i="0">
+                          <a:solidFill>
+                            <a:srgbClr val="242A33"/>
+                          </a:solidFill>
+                          <a:latin typeface="Segoe UI"/>
+                          <a:ea typeface="微软雅黑"/>
+                        </a:rPr>
+                        <a:t>T2</a:t>
+                      </a:r>
+                    </a:p>
+                  </a:txBody>
+                  <a:tcPr marL="100584" marR="100584" marT="27432" marB="27432" anchor="ctr">
+                    <a:solidFill>
+                      <a:srgbClr val="F2F4F7"/>
+                    </a:solidFill>
+                  </a:tcPr>
+                </a:tc>
+                <a:tc>
+                  <a:txBody>
+                    <a:bodyPr wrap="square"/>
+                    <a:lstStyle/>
+                    <a:p>
+                      <a:pPr algn="l">
+                        <a:lnSpc>
+                          <a:spcPct val="122000"/>
+                        </a:lnSpc>
+                        <a:spcBef>
+                          <a:spcPts val="0"/>
+                        </a:spcBef>
+                        <a:spcAft>
+                          <a:spcPts val="0"/>
+                        </a:spcAft>
+                      </a:pPr>
+                      <a:r>
+                        <a:rPr sz="1700" b="0" i="0">
+                          <a:solidFill>
+                            <a:srgbClr val="242A33"/>
+                          </a:solidFill>
+                          <a:latin typeface="Segoe UI"/>
+                          <a:ea typeface="微软雅黑"/>
+                        </a:rPr>
+                        <a:t>★★☆☆☆</a:t>
+                      </a:r>
+                    </a:p>
+                  </a:txBody>
+                  <a:tcPr marL="100584" marR="100584" marT="27432" marB="27432" anchor="ctr">
+                    <a:solidFill>
+                      <a:srgbClr val="F2F4F7"/>
+                    </a:solidFill>
+                  </a:tcPr>
+                </a:tc>
+                <a:tc>
+                  <a:txBody>
+                    <a:bodyPr wrap="square"/>
+                    <a:lstStyle/>
+                    <a:p>
+                      <a:pPr algn="l">
+                        <a:lnSpc>
+                          <a:spcPct val="122000"/>
+                        </a:lnSpc>
+                        <a:spcBef>
+                          <a:spcPts val="0"/>
+                        </a:spcBef>
+                        <a:spcAft>
+                          <a:spcPts val="0"/>
+                        </a:spcAft>
+                      </a:pPr>
+                      <a:r>
+                        <a:rPr sz="1700" b="0" i="0">
+                          <a:solidFill>
+                            <a:srgbClr val="242A33"/>
+                          </a:solidFill>
+                          <a:latin typeface="Segoe UI"/>
+                          <a:ea typeface="微软雅黑"/>
+                        </a:rPr>
+                        <a:t>70%</a:t>
+                      </a:r>
+                    </a:p>
+                  </a:txBody>
+                  <a:tcPr marL="100584" marR="100584" marT="27432" marB="27432" anchor="ctr">
+                    <a:solidFill>
+                      <a:srgbClr val="F2F4F7"/>
+                    </a:solidFill>
+                  </a:tcPr>
+                </a:tc>
+                <a:tc>
+                  <a:txBody>
+                    <a:bodyPr wrap="square"/>
+                    <a:lstStyle/>
+                    <a:p>
+                      <a:pPr algn="l">
+                        <a:lnSpc>
+                          <a:spcPct val="122000"/>
+                        </a:lnSpc>
+                        <a:spcBef>
+                          <a:spcPts val="0"/>
+                        </a:spcBef>
+                        <a:spcAft>
+                          <a:spcPts val="0"/>
+                        </a:spcAft>
+                      </a:pPr>
+                      <a:r>
+                        <a:rPr sz="1700" b="0" i="0">
+                          <a:solidFill>
+                            <a:srgbClr val="242A33"/>
+                          </a:solidFill>
+                          <a:latin typeface="Segoe UI"/>
+                          <a:ea typeface="微软雅黑"/>
+                        </a:rPr>
+                        <a:t>基础数据结构应用</a:t>
+                      </a:r>
+                    </a:p>
+                  </a:txBody>
+                  <a:tcPr marL="100584" marR="100584" marT="27432" marB="27432" anchor="ctr">
+                    <a:solidFill>
+                      <a:srgbClr val="F2F4F7"/>
+                    </a:solidFill>
+                  </a:tcPr>
+                </a:tc>
+              </a:tr>
+              <a:tr h="439420">
+                <a:tc>
+                  <a:txBody>
+                    <a:bodyPr wrap="square"/>
+                    <a:lstStyle/>
+                    <a:p>
+                      <a:pPr algn="l">
+                        <a:lnSpc>
+                          <a:spcPct val="122000"/>
+                        </a:lnSpc>
+                        <a:spcBef>
+                          <a:spcPts val="0"/>
+                        </a:spcBef>
+                        <a:spcAft>
+                          <a:spcPts val="0"/>
+                        </a:spcAft>
+                      </a:pPr>
+                      <a:r>
+                        <a:rPr sz="1700" b="0" i="0">
+                          <a:solidFill>
+                            <a:srgbClr val="242A33"/>
+                          </a:solidFill>
+                          <a:latin typeface="Segoe UI"/>
+                          <a:ea typeface="微软雅黑"/>
+                        </a:rPr>
+                        <a:t>T3</a:t>
+                      </a:r>
+                    </a:p>
+                  </a:txBody>
+                  <a:tcPr marL="100584" marR="100584" marT="27432" marB="27432" anchor="ctr">
+                    <a:solidFill>
+                      <a:srgbClr val="FFFFFF"/>
+                    </a:solidFill>
+                  </a:tcPr>
+                </a:tc>
+                <a:tc>
+                  <a:txBody>
+                    <a:bodyPr wrap="square"/>
+                    <a:lstStyle/>
+                    <a:p>
+                      <a:pPr algn="l">
+                        <a:lnSpc>
+                          <a:spcPct val="122000"/>
+                        </a:lnSpc>
+                        <a:spcBef>
+                          <a:spcPts val="0"/>
+                        </a:spcBef>
+                        <a:spcAft>
+                          <a:spcPts val="0"/>
+                        </a:spcAft>
+                      </a:pPr>
+                      <a:r>
+                        <a:rPr sz="1700" b="0" i="0">
+                          <a:solidFill>
+                            <a:srgbClr val="242A33"/>
+                          </a:solidFill>
+                          <a:latin typeface="Segoe UI"/>
+                          <a:ea typeface="微软雅黑"/>
+                        </a:rPr>
+                        <a:t>★★★☆☆</a:t>
+                      </a:r>
+                    </a:p>
+                  </a:txBody>
+                  <a:tcPr marL="100584" marR="100584" marT="27432" marB="27432" anchor="ctr">
+                    <a:solidFill>
+                      <a:srgbClr val="FFFFFF"/>
+                    </a:solidFill>
+                  </a:tcPr>
+                </a:tc>
+                <a:tc>
+                  <a:txBody>
+                    <a:bodyPr wrap="square"/>
+                    <a:lstStyle/>
+                    <a:p>
+                      <a:pPr algn="l">
+                        <a:lnSpc>
+                          <a:spcPct val="122000"/>
+                        </a:lnSpc>
+                        <a:spcBef>
+                          <a:spcPts val="0"/>
+                        </a:spcBef>
+                        <a:spcAft>
+                          <a:spcPts val="0"/>
+                        </a:spcAft>
+                      </a:pPr>
+                      <a:r>
+                        <a:rPr sz="1700" b="0" i="0">
+                          <a:solidFill>
+                            <a:srgbClr val="242A33"/>
+                          </a:solidFill>
+                          <a:latin typeface="Segoe UI"/>
+                          <a:ea typeface="微软雅黑"/>
+                        </a:rPr>
+                        <a:t>55%</a:t>
+                      </a:r>
+                    </a:p>
+                  </a:txBody>
+                  <a:tcPr marL="100584" marR="100584" marT="27432" marB="27432" anchor="ctr">
+                    <a:solidFill>
+                      <a:srgbClr val="FFFFFF"/>
+                    </a:solidFill>
+                  </a:tcPr>
+                </a:tc>
+                <a:tc>
+                  <a:txBody>
+                    <a:bodyPr wrap="square"/>
+                    <a:lstStyle/>
+                    <a:p>
+                      <a:pPr algn="l">
+                        <a:lnSpc>
+                          <a:spcPct val="122000"/>
+                        </a:lnSpc>
+                        <a:spcBef>
+                          <a:spcPts val="0"/>
+                        </a:spcBef>
+                        <a:spcAft>
+                          <a:spcPts val="0"/>
+                        </a:spcAft>
+                      </a:pPr>
+                      <a:r>
+                        <a:rPr sz="1700" b="0" i="0">
+                          <a:solidFill>
+                            <a:srgbClr val="242A33"/>
+                          </a:solidFill>
+                          <a:latin typeface="Segoe UI"/>
+                          <a:ea typeface="微软雅黑"/>
+                        </a:rPr>
+                        <a:t>需要一次转化（排序键）</a:t>
+                      </a:r>
+                    </a:p>
+                  </a:txBody>
+                  <a:tcPr marL="100584" marR="100584" marT="27432" marB="27432" anchor="ctr">
+                    <a:solidFill>
+                      <a:srgbClr val="FFFFFF"/>
+                    </a:solidFill>
+                  </a:tcPr>
+                </a:tc>
+              </a:tr>
+              <a:tr h="439420">
+                <a:tc>
+                  <a:txBody>
+                    <a:bodyPr wrap="square"/>
+                    <a:lstStyle/>
+                    <a:p>
+                      <a:pPr algn="l">
+                        <a:lnSpc>
+                          <a:spcPct val="122000"/>
+                        </a:lnSpc>
+                        <a:spcBef>
+                          <a:spcPts val="0"/>
+                        </a:spcBef>
+                        <a:spcAft>
+                          <a:spcPts val="0"/>
+                        </a:spcAft>
+                      </a:pPr>
+                      <a:r>
+                        <a:rPr sz="1700" b="0" i="0">
+                          <a:solidFill>
+                            <a:srgbClr val="242A33"/>
+                          </a:solidFill>
+                          <a:latin typeface="Segoe UI"/>
+                          <a:ea typeface="微软雅黑"/>
+                        </a:rPr>
+                        <a:t>T4</a:t>
+                      </a:r>
+                    </a:p>
+                  </a:txBody>
+                  <a:tcPr marL="100584" marR="100584" marT="27432" marB="27432" anchor="ctr">
+                    <a:solidFill>
+                      <a:srgbClr val="F2F4F7"/>
+                    </a:solidFill>
+                  </a:tcPr>
+                </a:tc>
+                <a:tc>
+                  <a:txBody>
+                    <a:bodyPr wrap="square"/>
+                    <a:lstStyle/>
+                    <a:p>
+                      <a:pPr algn="l">
+                        <a:lnSpc>
+                          <a:spcPct val="122000"/>
+                        </a:lnSpc>
+                        <a:spcBef>
+                          <a:spcPts val="0"/>
+                        </a:spcBef>
+                        <a:spcAft>
+                          <a:spcPts val="0"/>
+                        </a:spcAft>
+                      </a:pPr>
+                      <a:r>
+                        <a:rPr sz="1700" b="0" i="0">
+                          <a:solidFill>
+                            <a:srgbClr val="242A33"/>
+                          </a:solidFill>
+                          <a:latin typeface="Segoe UI"/>
+                          <a:ea typeface="微软雅黑"/>
+                        </a:rPr>
+                        <a:t>★★★☆☆</a:t>
+                      </a:r>
+                    </a:p>
+                  </a:txBody>
+                  <a:tcPr marL="100584" marR="100584" marT="27432" marB="27432" anchor="ctr">
+                    <a:solidFill>
+                      <a:srgbClr val="F2F4F7"/>
+                    </a:solidFill>
+                  </a:tcPr>
+                </a:tc>
+                <a:tc>
+                  <a:txBody>
+                    <a:bodyPr wrap="square"/>
+                    <a:lstStyle/>
+                    <a:p>
+                      <a:pPr algn="l">
+                        <a:lnSpc>
+                          <a:spcPct val="122000"/>
+                        </a:lnSpc>
+                        <a:spcBef>
+                          <a:spcPts val="0"/>
+                        </a:spcBef>
+                        <a:spcAft>
+                          <a:spcPts val="0"/>
+                        </a:spcAft>
+                      </a:pPr>
+                      <a:r>
+                        <a:rPr sz="1700" b="0" i="0">
+                          <a:solidFill>
+                            <a:srgbClr val="242A33"/>
+                          </a:solidFill>
+                          <a:latin typeface="Segoe UI"/>
+                          <a:ea typeface="微软雅黑"/>
+                        </a:rPr>
+                        <a:t>45%</a:t>
+                      </a:r>
+                    </a:p>
+                  </a:txBody>
+                  <a:tcPr marL="100584" marR="100584" marT="27432" marB="27432" anchor="ctr">
+                    <a:solidFill>
+                      <a:srgbClr val="F2F4F7"/>
+                    </a:solidFill>
+                  </a:tcPr>
+                </a:tc>
+                <a:tc>
+                  <a:txBody>
+                    <a:bodyPr wrap="square"/>
+                    <a:lstStyle/>
+                    <a:p>
+                      <a:pPr algn="l">
+                        <a:lnSpc>
+                          <a:spcPct val="122000"/>
+                        </a:lnSpc>
+                        <a:spcBef>
+                          <a:spcPts val="0"/>
+                        </a:spcBef>
+                        <a:spcAft>
+                          <a:spcPts val="0"/>
+                        </a:spcAft>
+                      </a:pPr>
+                      <a:r>
+                        <a:rPr sz="1700" b="0" i="0">
+                          <a:solidFill>
+                            <a:srgbClr val="242A33"/>
+                          </a:solidFill>
+                          <a:latin typeface="Segoe UI"/>
+                          <a:ea typeface="微软雅黑"/>
+                        </a:rPr>
+                        <a:t>带状态搜索</a:t>
+                      </a:r>
+                    </a:p>
+                  </a:txBody>
+                  <a:tcPr marL="100584" marR="100584" marT="27432" marB="27432" anchor="ctr">
+                    <a:solidFill>
+                      <a:srgbClr val="F2F4F7"/>
+                    </a:solidFill>
+                  </a:tcPr>
+                </a:tc>
+              </a:tr>
+              <a:tr h="439420">
+                <a:tc>
+                  <a:txBody>
+                    <a:bodyPr wrap="square"/>
+                    <a:lstStyle/>
+                    <a:p>
+                      <a:pPr algn="l">
+                        <a:lnSpc>
+                          <a:spcPct val="122000"/>
+                        </a:lnSpc>
+                        <a:spcBef>
+                          <a:spcPts val="0"/>
+                        </a:spcBef>
+                        <a:spcAft>
+                          <a:spcPts val="0"/>
+                        </a:spcAft>
+                      </a:pPr>
+                      <a:r>
+                        <a:rPr sz="1700" b="0" i="0">
+                          <a:solidFill>
+                            <a:srgbClr val="242A33"/>
+                          </a:solidFill>
+                          <a:latin typeface="Segoe UI"/>
+                          <a:ea typeface="微软雅黑"/>
+                        </a:rPr>
+                        <a:t>T5</a:t>
+                      </a:r>
+                    </a:p>
+                  </a:txBody>
+                  <a:tcPr marL="100584" marR="100584" marT="27432" marB="27432" anchor="ctr">
+                    <a:solidFill>
+                      <a:srgbClr val="FFFFFF"/>
+                    </a:solidFill>
+                  </a:tcPr>
+                </a:tc>
+                <a:tc>
+                  <a:txBody>
+                    <a:bodyPr wrap="square"/>
+                    <a:lstStyle/>
+                    <a:p>
+                      <a:pPr algn="l">
+                        <a:lnSpc>
+                          <a:spcPct val="122000"/>
+                        </a:lnSpc>
+                        <a:spcBef>
+                          <a:spcPts val="0"/>
+                        </a:spcBef>
+                        <a:spcAft>
+                          <a:spcPts val="0"/>
+                        </a:spcAft>
+                      </a:pPr>
+                      <a:r>
+                        <a:rPr sz="1700" b="0" i="0">
+                          <a:solidFill>
+                            <a:srgbClr val="242A33"/>
+                          </a:solidFill>
+                          <a:latin typeface="Segoe UI"/>
+                          <a:ea typeface="微软雅黑"/>
+                        </a:rPr>
+                        <a:t>★★★★☆</a:t>
+                      </a:r>
+                    </a:p>
+                  </a:txBody>
+                  <a:tcPr marL="100584" marR="100584" marT="27432" marB="27432" anchor="ctr">
+                    <a:solidFill>
+                      <a:srgbClr val="FFFFFF"/>
+                    </a:solidFill>
+                  </a:tcPr>
+                </a:tc>
+                <a:tc>
+                  <a:txBody>
+                    <a:bodyPr wrap="square"/>
+                    <a:lstStyle/>
+                    <a:p>
+                      <a:pPr algn="l">
+                        <a:lnSpc>
+                          <a:spcPct val="122000"/>
+                        </a:lnSpc>
+                        <a:spcBef>
+                          <a:spcPts val="0"/>
+                        </a:spcBef>
+                        <a:spcAft>
+                          <a:spcPts val="0"/>
+                        </a:spcAft>
+                      </a:pPr>
+                      <a:r>
+                        <a:rPr sz="1700" b="0" i="0">
+                          <a:solidFill>
+                            <a:srgbClr val="242A33"/>
+                          </a:solidFill>
+                          <a:latin typeface="Segoe UI"/>
+                          <a:ea typeface="微软雅黑"/>
+                        </a:rPr>
+                        <a:t>30%</a:t>
+                      </a:r>
+                    </a:p>
+                  </a:txBody>
+                  <a:tcPr marL="100584" marR="100584" marT="27432" marB="27432" anchor="ctr">
+                    <a:solidFill>
+                      <a:srgbClr val="FFFFFF"/>
+                    </a:solidFill>
+                  </a:tcPr>
+                </a:tc>
+                <a:tc>
+                  <a:txBody>
+                    <a:bodyPr wrap="square"/>
+                    <a:lstStyle/>
+                    <a:p>
+                      <a:pPr algn="l">
+                        <a:lnSpc>
+                          <a:spcPct val="122000"/>
+                        </a:lnSpc>
+                        <a:spcBef>
+                          <a:spcPts val="0"/>
+                        </a:spcBef>
+                        <a:spcAft>
+                          <a:spcPts val="0"/>
+                        </a:spcAft>
+                      </a:pPr>
+                      <a:r>
+                        <a:rPr sz="1700" b="0" i="0">
+                          <a:solidFill>
+                            <a:srgbClr val="242A33"/>
+                          </a:solidFill>
+                          <a:latin typeface="Segoe UI"/>
+                          <a:ea typeface="微软雅黑"/>
+                        </a:rPr>
+                        <a:t>DP，状态设计有难度</a:t>
+                      </a:r>
+                    </a:p>
+                  </a:txBody>
+                  <a:tcPr marL="100584" marR="100584" marT="27432" marB="27432" anchor="ctr">
+                    <a:solidFill>
+                      <a:srgbClr val="FFFFFF"/>
+                    </a:solidFill>
+                  </a:tcPr>
+                </a:tc>
+              </a:tr>
+              <a:tr h="439420">
+                <a:tc>
+                  <a:txBody>
+                    <a:bodyPr wrap="square"/>
+                    <a:lstStyle/>
+                    <a:p>
+                      <a:pPr algn="l">
+                        <a:lnSpc>
+                          <a:spcPct val="122000"/>
+                        </a:lnSpc>
+                        <a:spcBef>
+                          <a:spcPts val="0"/>
+                        </a:spcBef>
+                        <a:spcAft>
+                          <a:spcPts val="0"/>
+                        </a:spcAft>
+                      </a:pPr>
+                      <a:r>
+                        <a:rPr sz="1700" b="0" i="0">
+                          <a:solidFill>
+                            <a:srgbClr val="242A33"/>
+                          </a:solidFill>
+                          <a:latin typeface="Segoe UI"/>
+                          <a:ea typeface="微软雅黑"/>
+                        </a:rPr>
+                        <a:t>T6</a:t>
+                      </a:r>
+                    </a:p>
+                  </a:txBody>
+                  <a:tcPr marL="100584" marR="100584" marT="27432" marB="27432" anchor="ctr">
+                    <a:solidFill>
+                      <a:srgbClr val="F2F4F7"/>
+                    </a:solidFill>
+                  </a:tcPr>
+                </a:tc>
+                <a:tc>
+                  <a:txBody>
+                    <a:bodyPr wrap="square"/>
+                    <a:lstStyle/>
+                    <a:p>
+                      <a:pPr algn="l">
+                        <a:lnSpc>
+                          <a:spcPct val="122000"/>
+                        </a:lnSpc>
+                        <a:spcBef>
+                          <a:spcPts val="0"/>
+                        </a:spcBef>
+                        <a:spcAft>
+                          <a:spcPts val="0"/>
+                        </a:spcAft>
+                      </a:pPr>
+                      <a:r>
+                        <a:rPr sz="1700" b="0" i="0">
+                          <a:solidFill>
+                            <a:srgbClr val="242A33"/>
+                          </a:solidFill>
+                          <a:latin typeface="Segoe UI"/>
+                          <a:ea typeface="微软雅黑"/>
+                        </a:rPr>
+                        <a:t>★★★★★</a:t>
+                      </a:r>
+                    </a:p>
+                  </a:txBody>
+                  <a:tcPr marL="100584" marR="100584" marT="27432" marB="27432" anchor="ctr">
+                    <a:solidFill>
+                      <a:srgbClr val="F2F4F7"/>
+                    </a:solidFill>
+                  </a:tcPr>
+                </a:tc>
+                <a:tc>
+                  <a:txBody>
+                    <a:bodyPr wrap="square"/>
+                    <a:lstStyle/>
+                    <a:p>
+                      <a:pPr algn="l">
+                        <a:lnSpc>
+                          <a:spcPct val="122000"/>
+                        </a:lnSpc>
+                        <a:spcBef>
+                          <a:spcPts val="0"/>
+                        </a:spcBef>
+                        <a:spcAft>
+                          <a:spcPts val="0"/>
+                        </a:spcAft>
+                      </a:pPr>
+                      <a:r>
+                        <a:rPr sz="1700" b="0" i="0">
+                          <a:solidFill>
+                            <a:srgbClr val="242A33"/>
+                          </a:solidFill>
+                          <a:latin typeface="Segoe UI"/>
+                          <a:ea typeface="微软雅黑"/>
+                        </a:rPr>
+                        <a:t>15%</a:t>
+                      </a:r>
+                    </a:p>
+                  </a:txBody>
+                  <a:tcPr marL="100584" marR="100584" marT="27432" marB="27432" anchor="ctr">
+                    <a:solidFill>
+                      <a:srgbClr val="F2F4F7"/>
+                    </a:solidFill>
+                  </a:tcPr>
+                </a:tc>
+                <a:tc>
+                  <a:txBody>
+                    <a:bodyPr wrap="square"/>
+                    <a:lstStyle/>
+                    <a:p>
+                      <a:pPr algn="l">
+                        <a:lnSpc>
+                          <a:spcPct val="122000"/>
+                        </a:lnSpc>
+                        <a:spcBef>
+                          <a:spcPts val="0"/>
+                        </a:spcBef>
+                        <a:spcAft>
+                          <a:spcPts val="0"/>
+                        </a:spcAft>
+                      </a:pPr>
+                      <a:r>
+                        <a:rPr sz="1700" b="0" i="0">
+                          <a:solidFill>
+                            <a:srgbClr val="242A33"/>
+                          </a:solidFill>
+                          <a:latin typeface="Segoe UI"/>
+                          <a:ea typeface="微软雅黑"/>
+                        </a:rPr>
+                        <a:t>综合建模 —— 区分优秀</a:t>
+                      </a:r>
+                    </a:p>
+                  </a:txBody>
+                  <a:tcPr marL="100584" marR="100584" marT="27432" marB="27432" anchor="ctr">
+                    <a:solidFill>
+                      <a:srgbClr val="F2F4F7"/>
+                    </a:solidFill>
+                  </a:tcPr>
+                </a:tc>
+              </a:tr>
+            </a:tbl>
+          </a:graphicData>
+        </a:graphic>
+      </p:graphicFrame>
       <p:sp>
         <p:nvSpPr>
           <p:cNvPr id="5" name="TextBox 4"/>
@@ -5632,7 +6442,7 @@
         </p:nvSpPr>
         <p:spPr>
           <a:xfrm>
-            <a:off x="566928" y="5888736"/>
+            <a:off x="566928" y="4520692"/>
             <a:ext cx="11057839" cy="329184"/>
           </a:xfrm>
           <a:prstGeom prst="rect">
@@ -21115,7 +21925,7 @@
                 <a:latin typeface="Consolas"/>
                 <a:ea typeface="Consolas"/>
               </a:rPr>
-              <a:t>   暴力枚举 --剪枝--&gt; 回溯 (W9)</a:t>
+              <a:t>   暴力枚举</a:t>
             </a:r>
           </a:p>
           <a:p>
@@ -21161,7 +21971,7 @@
                 <a:latin typeface="Consolas"/>
                 <a:ea typeface="Consolas"/>
               </a:rPr>
-              <a:t>       +--排序后一遍扫--&gt; 贪心 (W6, W10)</a:t>
+              <a:t>       +-- 剪枝 -&gt; 回溯 (W9)</a:t>
             </a:r>
           </a:p>
           <a:p>
@@ -21184,7 +21994,7 @@
                 <a:latin typeface="Consolas"/>
                 <a:ea typeface="Consolas"/>
               </a:rPr>
-              <a:t>       |                     |</a:t>
+              <a:t>       |</a:t>
             </a:r>
           </a:p>
           <a:p>
@@ -21207,7 +22017,7 @@
                 <a:latin typeface="Consolas"/>
                 <a:ea typeface="Consolas"/>
               </a:rPr>
-              <a:t>       |                 贪心失效</a:t>
+              <a:t>       +-- 排序后一遍扫 -&gt; 贪心 (W6, W10)；贪心失效时 -&gt; 动态规划</a:t>
             </a:r>
           </a:p>
           <a:p>
@@ -21230,7 +22040,7 @@
                 <a:latin typeface="Consolas"/>
                 <a:ea typeface="Consolas"/>
               </a:rPr>
-              <a:t>       |                     v</a:t>
+              <a:t>       |</a:t>
             </a:r>
           </a:p>
           <a:p>
@@ -21253,7 +22063,7 @@
                 <a:latin typeface="Consolas"/>
                 <a:ea typeface="Consolas"/>
               </a:rPr>
-              <a:t>       +--记忆化--------&gt; 动态规划 (W10, W11)</a:t>
+              <a:t>       +-- 记忆化 -&gt; 动态规划 (W10, W11)</a:t>
             </a:r>
           </a:p>
           <a:p>
@@ -21299,7 +22109,7 @@
                 <a:latin typeface="Consolas"/>
                 <a:ea typeface="Consolas"/>
               </a:rPr>
-              <a:t>       +--按层扩展------&gt; BFS (W12) --边权不同--&gt; Dijkstra (W12)</a:t>
+              <a:t>       +-- 按层扩展 -&gt; BFS (W12)；边权不同 -&gt; Dijkstra (W12)</a:t>
             </a:r>
           </a:p>
           <a:p>

--- a/courseware/202612_ADS_W16_Review_Final_Machine_Exam.pptx
+++ b/courseware/202612_ADS_W16_Review_Final_Machine_Exam.pptx
@@ -6788,7 +6788,7 @@
                 <a:latin typeface="Segoe UI"/>
                 <a:ea typeface="微软雅黑"/>
               </a:rPr>
-              <a:t>T1 成绩单核对（15 分）★☆☆☆☆</a:t>
+              <a:t>T1 成绩单核对★☆☆☆☆</a:t>
             </a:r>
           </a:p>
         </p:txBody>
@@ -7987,7 +7987,7 @@
                 <a:latin typeface="Segoe UI"/>
                 <a:ea typeface="微软雅黑"/>
               </a:rPr>
-              <a:t>T2 括号嵌套深度（15 分）★★☆☆☆</a:t>
+              <a:t>T2 括号嵌套深度★★☆☆☆</a:t>
             </a:r>
           </a:p>
         </p:txBody>
@@ -9517,7 +9517,7 @@
                 <a:latin typeface="Segoe UI"/>
                 <a:ea typeface="微软雅黑"/>
               </a:rPr>
-              <a:t>T3 会议室数量（15 分）★★★☆☆</a:t>
+              <a:t>T3 会议室数量★★★☆☆</a:t>
             </a:r>
           </a:p>
         </p:txBody>
@@ -11461,7 +11461,7 @@
                 <a:latin typeface="Segoe UI"/>
                 <a:ea typeface="微软雅黑"/>
               </a:rPr>
-              <a:t>T4 穿墙迷宫（15 分）★★★☆☆</a:t>
+              <a:t>T4 穿墙迷宫★★★☆☆</a:t>
             </a:r>
           </a:p>
         </p:txBody>
@@ -13388,7 +13388,7 @@
                 <a:latin typeface="Segoe UI"/>
                 <a:ea typeface="微软雅黑"/>
               </a:rPr>
-              <a:t>T5 作业时间分配（20 分）★★★★☆</a:t>
+              <a:t>T5 作业时间分配★★★★☆</a:t>
             </a:r>
           </a:p>
         </p:txBody>
@@ -14653,7 +14653,7 @@
                 <a:latin typeface="Segoe UI"/>
                 <a:ea typeface="微软雅黑"/>
               </a:rPr>
-              <a:t>T6 电网巡检（20 分）★★★★★</a:t>
+              <a:t>T6 电网巡检★★★★★</a:t>
             </a:r>
           </a:p>
         </p:txBody>
